--- a/figures/fig6.pptx
+++ b/figures/fig6.pptx
@@ -7,7 +7,7 @@
   <p:sldIdLst>
     <p:sldId id="256" r:id="rId2"/>
   </p:sldIdLst>
-  <p:sldSz cx="12599988" cy="8640763"/>
+  <p:sldSz cx="19799300" cy="12599988"/>
   <p:notesSz cx="6858000" cy="9144000"/>
   <p:custDataLst>
     <p:tags r:id="rId3"/>
@@ -16,8 +16,8 @@
     <a:defPPr>
       <a:defRPr lang="en-US"/>
     </a:defPPr>
-    <a:lvl1pPr marL="0" algn="l" defTabSz="1166494" rtl="0" eaLnBrk="1" latinLnBrk="0" hangingPunct="1">
-      <a:defRPr sz="2297" kern="1200">
+    <a:lvl1pPr marL="0" algn="l" defTabSz="1779253" rtl="0" eaLnBrk="1" latinLnBrk="0" hangingPunct="1">
+      <a:defRPr sz="3504" kern="1200">
         <a:solidFill>
           <a:schemeClr val="tx1"/>
         </a:solidFill>
@@ -26,8 +26,8 @@
         <a:cs typeface="+mn-cs"/>
       </a:defRPr>
     </a:lvl1pPr>
-    <a:lvl2pPr marL="583248" algn="l" defTabSz="1166494" rtl="0" eaLnBrk="1" latinLnBrk="0" hangingPunct="1">
-      <a:defRPr sz="2297" kern="1200">
+    <a:lvl2pPr marL="889628" algn="l" defTabSz="1779253" rtl="0" eaLnBrk="1" latinLnBrk="0" hangingPunct="1">
+      <a:defRPr sz="3504" kern="1200">
         <a:solidFill>
           <a:schemeClr val="tx1"/>
         </a:solidFill>
@@ -36,8 +36,8 @@
         <a:cs typeface="+mn-cs"/>
       </a:defRPr>
     </a:lvl2pPr>
-    <a:lvl3pPr marL="1166494" algn="l" defTabSz="1166494" rtl="0" eaLnBrk="1" latinLnBrk="0" hangingPunct="1">
-      <a:defRPr sz="2297" kern="1200">
+    <a:lvl3pPr marL="1779253" algn="l" defTabSz="1779253" rtl="0" eaLnBrk="1" latinLnBrk="0" hangingPunct="1">
+      <a:defRPr sz="3504" kern="1200">
         <a:solidFill>
           <a:schemeClr val="tx1"/>
         </a:solidFill>
@@ -46,8 +46,8 @@
         <a:cs typeface="+mn-cs"/>
       </a:defRPr>
     </a:lvl3pPr>
-    <a:lvl4pPr marL="1749742" algn="l" defTabSz="1166494" rtl="0" eaLnBrk="1" latinLnBrk="0" hangingPunct="1">
-      <a:defRPr sz="2297" kern="1200">
+    <a:lvl4pPr marL="2668881" algn="l" defTabSz="1779253" rtl="0" eaLnBrk="1" latinLnBrk="0" hangingPunct="1">
+      <a:defRPr sz="3504" kern="1200">
         <a:solidFill>
           <a:schemeClr val="tx1"/>
         </a:solidFill>
@@ -56,8 +56,8 @@
         <a:cs typeface="+mn-cs"/>
       </a:defRPr>
     </a:lvl4pPr>
-    <a:lvl5pPr marL="2332989" algn="l" defTabSz="1166494" rtl="0" eaLnBrk="1" latinLnBrk="0" hangingPunct="1">
-      <a:defRPr sz="2297" kern="1200">
+    <a:lvl5pPr marL="3558508" algn="l" defTabSz="1779253" rtl="0" eaLnBrk="1" latinLnBrk="0" hangingPunct="1">
+      <a:defRPr sz="3504" kern="1200">
         <a:solidFill>
           <a:schemeClr val="tx1"/>
         </a:solidFill>
@@ -66,8 +66,8 @@
         <a:cs typeface="+mn-cs"/>
       </a:defRPr>
     </a:lvl5pPr>
-    <a:lvl6pPr marL="2916237" algn="l" defTabSz="1166494" rtl="0" eaLnBrk="1" latinLnBrk="0" hangingPunct="1">
-      <a:defRPr sz="2297" kern="1200">
+    <a:lvl6pPr marL="4448136" algn="l" defTabSz="1779253" rtl="0" eaLnBrk="1" latinLnBrk="0" hangingPunct="1">
+      <a:defRPr sz="3504" kern="1200">
         <a:solidFill>
           <a:schemeClr val="tx1"/>
         </a:solidFill>
@@ -76,8 +76,8 @@
         <a:cs typeface="+mn-cs"/>
       </a:defRPr>
     </a:lvl6pPr>
-    <a:lvl7pPr marL="3499484" algn="l" defTabSz="1166494" rtl="0" eaLnBrk="1" latinLnBrk="0" hangingPunct="1">
-      <a:defRPr sz="2297" kern="1200">
+    <a:lvl7pPr marL="5337763" algn="l" defTabSz="1779253" rtl="0" eaLnBrk="1" latinLnBrk="0" hangingPunct="1">
+      <a:defRPr sz="3504" kern="1200">
         <a:solidFill>
           <a:schemeClr val="tx1"/>
         </a:solidFill>
@@ -86,8 +86,8 @@
         <a:cs typeface="+mn-cs"/>
       </a:defRPr>
     </a:lvl7pPr>
-    <a:lvl8pPr marL="4082731" algn="l" defTabSz="1166494" rtl="0" eaLnBrk="1" latinLnBrk="0" hangingPunct="1">
-      <a:defRPr sz="2297" kern="1200">
+    <a:lvl8pPr marL="6227390" algn="l" defTabSz="1779253" rtl="0" eaLnBrk="1" latinLnBrk="0" hangingPunct="1">
+      <a:defRPr sz="3504" kern="1200">
         <a:solidFill>
           <a:schemeClr val="tx1"/>
         </a:solidFill>
@@ -96,8 +96,8 @@
         <a:cs typeface="+mn-cs"/>
       </a:defRPr>
     </a:lvl8pPr>
-    <a:lvl9pPr marL="4665979" algn="l" defTabSz="1166494" rtl="0" eaLnBrk="1" latinLnBrk="0" hangingPunct="1">
-      <a:defRPr sz="2297" kern="1200">
+    <a:lvl9pPr marL="7117018" algn="l" defTabSz="1779253" rtl="0" eaLnBrk="1" latinLnBrk="0" hangingPunct="1">
+      <a:defRPr sz="3504" kern="1200">
         <a:solidFill>
           <a:schemeClr val="tx1"/>
         </a:solidFill>
@@ -110,12 +110,12 @@
   <p:extLst>
     <p:ext uri="{EFAFB233-063F-42B5-8137-9DF3F51BA10A}">
       <p15:sldGuideLst xmlns:p15="http://schemas.microsoft.com/office/powerpoint/2012/main">
-        <p15:guide id="1" orient="horz" pos="2722" userDrawn="1">
+        <p15:guide id="1" orient="horz" pos="3969" userDrawn="1">
           <p15:clr>
             <a:srgbClr val="A4A3A4"/>
           </p15:clr>
         </p15:guide>
-        <p15:guide id="2" pos="3969" userDrawn="1">
+        <p15:guide id="2" pos="6237" userDrawn="1">
           <p15:clr>
             <a:srgbClr val="A4A3A4"/>
           </p15:clr>
@@ -155,8 +155,8 @@
         </p:nvSpPr>
         <p:spPr>
           <a:xfrm>
-            <a:off x="945000" y="2684241"/>
-            <a:ext cx="10709990" cy="1852163"/>
+            <a:off x="1484949" y="3914169"/>
+            <a:ext cx="16829405" cy="2700830"/>
           </a:xfrm>
         </p:spPr>
         <p:txBody>
@@ -183,8 +183,8 @@
         </p:nvSpPr>
         <p:spPr>
           <a:xfrm>
-            <a:off x="1890001" y="4896436"/>
-            <a:ext cx="8819991" cy="2208195"/>
+            <a:off x="2969900" y="7139999"/>
+            <a:ext cx="13859509" cy="3219997"/>
           </a:xfrm>
         </p:spPr>
         <p:txBody>
@@ -200,7 +200,7 @@
                 </a:solidFill>
               </a:defRPr>
             </a:lvl1pPr>
-            <a:lvl2pPr marL="266704" indent="0" algn="ctr">
+            <a:lvl2pPr marL="388908" indent="0" algn="ctr">
               <a:buNone/>
               <a:defRPr>
                 <a:solidFill>
@@ -210,7 +210,7 @@
                 </a:solidFill>
               </a:defRPr>
             </a:lvl2pPr>
-            <a:lvl3pPr marL="533407" indent="0" algn="ctr">
+            <a:lvl3pPr marL="777814" indent="0" algn="ctr">
               <a:buNone/>
               <a:defRPr>
                 <a:solidFill>
@@ -220,7 +220,7 @@
                 </a:solidFill>
               </a:defRPr>
             </a:lvl3pPr>
-            <a:lvl4pPr marL="800110" indent="0" algn="ctr">
+            <a:lvl4pPr marL="1166720" indent="0" algn="ctr">
               <a:buNone/>
               <a:defRPr>
                 <a:solidFill>
@@ -230,7 +230,7 @@
                 </a:solidFill>
               </a:defRPr>
             </a:lvl4pPr>
-            <a:lvl5pPr marL="1066813" indent="0" algn="ctr">
+            <a:lvl5pPr marL="1555627" indent="0" algn="ctr">
               <a:buNone/>
               <a:defRPr>
                 <a:solidFill>
@@ -240,7 +240,7 @@
                 </a:solidFill>
               </a:defRPr>
             </a:lvl5pPr>
-            <a:lvl6pPr marL="1333517" indent="0" algn="ctr">
+            <a:lvl6pPr marL="1944534" indent="0" algn="ctr">
               <a:buNone/>
               <a:defRPr>
                 <a:solidFill>
@@ -250,7 +250,7 @@
                 </a:solidFill>
               </a:defRPr>
             </a:lvl6pPr>
-            <a:lvl7pPr marL="1600220" indent="0" algn="ctr">
+            <a:lvl7pPr marL="2333441" indent="0" algn="ctr">
               <a:buNone/>
               <a:defRPr>
                 <a:solidFill>
@@ -260,7 +260,7 @@
                 </a:solidFill>
               </a:defRPr>
             </a:lvl7pPr>
-            <a:lvl8pPr marL="1866924" indent="0" algn="ctr">
+            <a:lvl8pPr marL="2722349" indent="0" algn="ctr">
               <a:buNone/>
               <a:defRPr>
                 <a:solidFill>
@@ -270,7 +270,7 @@
                 </a:solidFill>
               </a:defRPr>
             </a:lvl8pPr>
-            <a:lvl9pPr marL="2133627" indent="0" algn="ctr">
+            <a:lvl9pPr marL="3111255" indent="0" algn="ctr">
               <a:buNone/>
               <a:defRPr>
                 <a:solidFill>
@@ -307,7 +307,7 @@
           <a:p>
             <a:fld id="{E6744CE3-0875-4B69-89C0-6F72D8139561}" type="datetimeFigureOut">
               <a:rPr lang="en-GB" smtClean="0"/>
-              <a:t>06/02/2025</a:t>
+              <a:t>28/10/2025</a:t>
             </a:fld>
             <a:endParaRPr lang="en-GB"/>
           </a:p>
@@ -477,7 +477,7 @@
           <a:p>
             <a:fld id="{E6744CE3-0875-4B69-89C0-6F72D8139561}" type="datetimeFigureOut">
               <a:rPr lang="en-GB" smtClean="0"/>
-              <a:t>06/02/2025</a:t>
+              <a:t>28/10/2025</a:t>
             </a:fld>
             <a:endParaRPr lang="en-GB"/>
           </a:p>
@@ -567,15 +567,15 @@
         </p:nvSpPr>
         <p:spPr>
           <a:xfrm>
-            <a:off x="995316" y="5552494"/>
-            <a:ext cx="10709990" cy="1716152"/>
+            <a:off x="1564014" y="8096664"/>
+            <a:ext cx="16829405" cy="2502498"/>
           </a:xfrm>
         </p:spPr>
         <p:txBody>
           <a:bodyPr anchor="t"/>
           <a:lstStyle>
             <a:lvl1pPr algn="l">
-              <a:defRPr sz="2333" b="1" cap="all"/>
+              <a:defRPr sz="3402" b="1" cap="all"/>
             </a:lvl1pPr>
           </a:lstStyle>
           <a:p>
@@ -599,8 +599,8 @@
         </p:nvSpPr>
         <p:spPr>
           <a:xfrm>
-            <a:off x="995316" y="3662328"/>
-            <a:ext cx="10709990" cy="1890166"/>
+            <a:off x="1564014" y="5340418"/>
+            <a:ext cx="16829405" cy="2756246"/>
           </a:xfrm>
         </p:spPr>
         <p:txBody>
@@ -608,7 +608,7 @@
           <a:lstStyle>
             <a:lvl1pPr marL="0" indent="0">
               <a:buNone/>
-              <a:defRPr sz="1167">
+              <a:defRPr sz="1702">
                 <a:solidFill>
                   <a:schemeClr val="tx1">
                     <a:tint val="75000"/>
@@ -616,9 +616,9 @@
                 </a:solidFill>
               </a:defRPr>
             </a:lvl1pPr>
-            <a:lvl2pPr marL="266704" indent="0">
-              <a:buNone/>
-              <a:defRPr sz="1050">
+            <a:lvl2pPr marL="388908" indent="0">
+              <a:buNone/>
+              <a:defRPr sz="1531">
                 <a:solidFill>
                   <a:schemeClr val="tx1">
                     <a:tint val="75000"/>
@@ -626,9 +626,9 @@
                 </a:solidFill>
               </a:defRPr>
             </a:lvl2pPr>
-            <a:lvl3pPr marL="533407" indent="0">
-              <a:buNone/>
-              <a:defRPr sz="933">
+            <a:lvl3pPr marL="777814" indent="0">
+              <a:buNone/>
+              <a:defRPr sz="1361">
                 <a:solidFill>
                   <a:schemeClr val="tx1">
                     <a:tint val="75000"/>
@@ -636,9 +636,9 @@
                 </a:solidFill>
               </a:defRPr>
             </a:lvl3pPr>
-            <a:lvl4pPr marL="800110" indent="0">
-              <a:buNone/>
-              <a:defRPr sz="817">
+            <a:lvl4pPr marL="1166720" indent="0">
+              <a:buNone/>
+              <a:defRPr sz="1191">
                 <a:solidFill>
                   <a:schemeClr val="tx1">
                     <a:tint val="75000"/>
@@ -646,9 +646,9 @@
                 </a:solidFill>
               </a:defRPr>
             </a:lvl4pPr>
-            <a:lvl5pPr marL="1066813" indent="0">
-              <a:buNone/>
-              <a:defRPr sz="817">
+            <a:lvl5pPr marL="1555627" indent="0">
+              <a:buNone/>
+              <a:defRPr sz="1191">
                 <a:solidFill>
                   <a:schemeClr val="tx1">
                     <a:tint val="75000"/>
@@ -656,9 +656,9 @@
                 </a:solidFill>
               </a:defRPr>
             </a:lvl5pPr>
-            <a:lvl6pPr marL="1333517" indent="0">
-              <a:buNone/>
-              <a:defRPr sz="817">
+            <a:lvl6pPr marL="1944534" indent="0">
+              <a:buNone/>
+              <a:defRPr sz="1191">
                 <a:solidFill>
                   <a:schemeClr val="tx1">
                     <a:tint val="75000"/>
@@ -666,9 +666,9 @@
                 </a:solidFill>
               </a:defRPr>
             </a:lvl6pPr>
-            <a:lvl7pPr marL="1600220" indent="0">
-              <a:buNone/>
-              <a:defRPr sz="817">
+            <a:lvl7pPr marL="2333441" indent="0">
+              <a:buNone/>
+              <a:defRPr sz="1191">
                 <a:solidFill>
                   <a:schemeClr val="tx1">
                     <a:tint val="75000"/>
@@ -676,9 +676,9 @@
                 </a:solidFill>
               </a:defRPr>
             </a:lvl7pPr>
-            <a:lvl8pPr marL="1866924" indent="0">
-              <a:buNone/>
-              <a:defRPr sz="817">
+            <a:lvl8pPr marL="2722349" indent="0">
+              <a:buNone/>
+              <a:defRPr sz="1191">
                 <a:solidFill>
                   <a:schemeClr val="tx1">
                     <a:tint val="75000"/>
@@ -686,9 +686,9 @@
                 </a:solidFill>
               </a:defRPr>
             </a:lvl8pPr>
-            <a:lvl9pPr marL="2133627" indent="0">
-              <a:buNone/>
-              <a:defRPr sz="817">
+            <a:lvl9pPr marL="3111255" indent="0">
+              <a:buNone/>
+              <a:defRPr sz="1191">
                 <a:solidFill>
                   <a:schemeClr val="tx1">
                     <a:tint val="75000"/>
@@ -723,7 +723,7 @@
           <a:p>
             <a:fld id="{E6744CE3-0875-4B69-89C0-6F72D8139561}" type="datetimeFigureOut">
               <a:rPr lang="en-GB" smtClean="0"/>
-              <a:t>06/02/2025</a:t>
+              <a:t>28/10/2025</a:t>
             </a:fld>
             <a:endParaRPr lang="en-GB"/>
           </a:p>
@@ -836,39 +836,39 @@
         </p:nvSpPr>
         <p:spPr>
           <a:xfrm>
-            <a:off x="630000" y="2016180"/>
-            <a:ext cx="5564994" cy="5702504"/>
+            <a:off x="989966" y="2940000"/>
+            <a:ext cx="8744690" cy="8315409"/>
           </a:xfrm>
         </p:spPr>
         <p:txBody>
           <a:bodyPr/>
           <a:lstStyle>
             <a:lvl1pPr>
-              <a:defRPr sz="1634"/>
+              <a:defRPr sz="2383"/>
             </a:lvl1pPr>
             <a:lvl2pPr>
-              <a:defRPr sz="1400"/>
+              <a:defRPr sz="2041"/>
             </a:lvl2pPr>
             <a:lvl3pPr>
-              <a:defRPr sz="1167"/>
+              <a:defRPr sz="1702"/>
             </a:lvl3pPr>
             <a:lvl4pPr>
-              <a:defRPr sz="1050"/>
+              <a:defRPr sz="1531"/>
             </a:lvl4pPr>
             <a:lvl5pPr>
-              <a:defRPr sz="1050"/>
+              <a:defRPr sz="1531"/>
             </a:lvl5pPr>
             <a:lvl6pPr>
-              <a:defRPr sz="1050"/>
+              <a:defRPr sz="1531"/>
             </a:lvl6pPr>
             <a:lvl7pPr>
-              <a:defRPr sz="1050"/>
+              <a:defRPr sz="1531"/>
             </a:lvl7pPr>
             <a:lvl8pPr>
-              <a:defRPr sz="1050"/>
+              <a:defRPr sz="1531"/>
             </a:lvl8pPr>
             <a:lvl9pPr>
-              <a:defRPr sz="1050"/>
+              <a:defRPr sz="1531"/>
             </a:lvl9pPr>
           </a:lstStyle>
           <a:p>
@@ -921,39 +921,39 @@
         </p:nvSpPr>
         <p:spPr>
           <a:xfrm>
-            <a:off x="6404997" y="2016180"/>
-            <a:ext cx="5564994" cy="5702504"/>
+            <a:off x="10064649" y="2940000"/>
+            <a:ext cx="8744690" cy="8315409"/>
           </a:xfrm>
         </p:spPr>
         <p:txBody>
           <a:bodyPr/>
           <a:lstStyle>
             <a:lvl1pPr>
-              <a:defRPr sz="1634"/>
+              <a:defRPr sz="2383"/>
             </a:lvl1pPr>
             <a:lvl2pPr>
-              <a:defRPr sz="1400"/>
+              <a:defRPr sz="2041"/>
             </a:lvl2pPr>
             <a:lvl3pPr>
-              <a:defRPr sz="1167"/>
+              <a:defRPr sz="1702"/>
             </a:lvl3pPr>
             <a:lvl4pPr>
-              <a:defRPr sz="1050"/>
+              <a:defRPr sz="1531"/>
             </a:lvl4pPr>
             <a:lvl5pPr>
-              <a:defRPr sz="1050"/>
+              <a:defRPr sz="1531"/>
             </a:lvl5pPr>
             <a:lvl6pPr>
-              <a:defRPr sz="1050"/>
+              <a:defRPr sz="1531"/>
             </a:lvl6pPr>
             <a:lvl7pPr>
-              <a:defRPr sz="1050"/>
+              <a:defRPr sz="1531"/>
             </a:lvl7pPr>
             <a:lvl8pPr>
-              <a:defRPr sz="1050"/>
+              <a:defRPr sz="1531"/>
             </a:lvl8pPr>
             <a:lvl9pPr>
-              <a:defRPr sz="1050"/>
+              <a:defRPr sz="1531"/>
             </a:lvl9pPr>
           </a:lstStyle>
           <a:p>
@@ -1011,7 +1011,7 @@
           <a:p>
             <a:fld id="{E6744CE3-0875-4B69-89C0-6F72D8139561}" type="datetimeFigureOut">
               <a:rPr lang="en-GB" smtClean="0"/>
-              <a:t>06/02/2025</a:t>
+              <a:t>28/10/2025</a:t>
             </a:fld>
             <a:endParaRPr lang="en-GB"/>
           </a:p>
@@ -1128,8 +1128,8 @@
         </p:nvSpPr>
         <p:spPr>
           <a:xfrm>
-            <a:off x="630002" y="1934175"/>
-            <a:ext cx="5567183" cy="806070"/>
+            <a:off x="989970" y="2820420"/>
+            <a:ext cx="8748129" cy="1175414"/>
           </a:xfrm>
         </p:spPr>
         <p:txBody>
@@ -1137,39 +1137,39 @@
           <a:lstStyle>
             <a:lvl1pPr marL="0" indent="0">
               <a:buNone/>
-              <a:defRPr sz="1400" b="1"/>
+              <a:defRPr sz="2041" b="1"/>
             </a:lvl1pPr>
-            <a:lvl2pPr marL="266704" indent="0">
-              <a:buNone/>
-              <a:defRPr sz="1167" b="1"/>
+            <a:lvl2pPr marL="388908" indent="0">
+              <a:buNone/>
+              <a:defRPr sz="1702" b="1"/>
             </a:lvl2pPr>
-            <a:lvl3pPr marL="533407" indent="0">
-              <a:buNone/>
-              <a:defRPr sz="1050" b="1"/>
+            <a:lvl3pPr marL="777814" indent="0">
+              <a:buNone/>
+              <a:defRPr sz="1531" b="1"/>
             </a:lvl3pPr>
-            <a:lvl4pPr marL="800110" indent="0">
-              <a:buNone/>
-              <a:defRPr sz="933" b="1"/>
+            <a:lvl4pPr marL="1166720" indent="0">
+              <a:buNone/>
+              <a:defRPr sz="1361" b="1"/>
             </a:lvl4pPr>
-            <a:lvl5pPr marL="1066813" indent="0">
-              <a:buNone/>
-              <a:defRPr sz="933" b="1"/>
+            <a:lvl5pPr marL="1555627" indent="0">
+              <a:buNone/>
+              <a:defRPr sz="1361" b="1"/>
             </a:lvl5pPr>
-            <a:lvl6pPr marL="1333517" indent="0">
-              <a:buNone/>
-              <a:defRPr sz="933" b="1"/>
+            <a:lvl6pPr marL="1944534" indent="0">
+              <a:buNone/>
+              <a:defRPr sz="1361" b="1"/>
             </a:lvl6pPr>
-            <a:lvl7pPr marL="1600220" indent="0">
-              <a:buNone/>
-              <a:defRPr sz="933" b="1"/>
+            <a:lvl7pPr marL="2333441" indent="0">
+              <a:buNone/>
+              <a:defRPr sz="1361" b="1"/>
             </a:lvl7pPr>
-            <a:lvl8pPr marL="1866924" indent="0">
-              <a:buNone/>
-              <a:defRPr sz="933" b="1"/>
+            <a:lvl8pPr marL="2722349" indent="0">
+              <a:buNone/>
+              <a:defRPr sz="1361" b="1"/>
             </a:lvl8pPr>
-            <a:lvl9pPr marL="2133627" indent="0">
-              <a:buNone/>
-              <a:defRPr sz="933" b="1"/>
+            <a:lvl9pPr marL="3111255" indent="0">
+              <a:buNone/>
+              <a:defRPr sz="1361" b="1"/>
             </a:lvl9pPr>
           </a:lstStyle>
           <a:p>
@@ -1193,39 +1193,39 @@
         </p:nvSpPr>
         <p:spPr>
           <a:xfrm>
-            <a:off x="630002" y="2740242"/>
-            <a:ext cx="5567183" cy="4978440"/>
+            <a:off x="989970" y="3995830"/>
+            <a:ext cx="8748129" cy="7259577"/>
           </a:xfrm>
         </p:spPr>
         <p:txBody>
           <a:bodyPr/>
           <a:lstStyle>
             <a:lvl1pPr>
-              <a:defRPr sz="1400"/>
+              <a:defRPr sz="2041"/>
             </a:lvl1pPr>
             <a:lvl2pPr>
-              <a:defRPr sz="1167"/>
+              <a:defRPr sz="1702"/>
             </a:lvl2pPr>
             <a:lvl3pPr>
-              <a:defRPr sz="1050"/>
+              <a:defRPr sz="1531"/>
             </a:lvl3pPr>
             <a:lvl4pPr>
-              <a:defRPr sz="933"/>
+              <a:defRPr sz="1361"/>
             </a:lvl4pPr>
             <a:lvl5pPr>
-              <a:defRPr sz="933"/>
+              <a:defRPr sz="1361"/>
             </a:lvl5pPr>
             <a:lvl6pPr>
-              <a:defRPr sz="933"/>
+              <a:defRPr sz="1361"/>
             </a:lvl6pPr>
             <a:lvl7pPr>
-              <a:defRPr sz="933"/>
+              <a:defRPr sz="1361"/>
             </a:lvl7pPr>
             <a:lvl8pPr>
-              <a:defRPr sz="933"/>
+              <a:defRPr sz="1361"/>
             </a:lvl8pPr>
             <a:lvl9pPr>
-              <a:defRPr sz="933"/>
+              <a:defRPr sz="1361"/>
             </a:lvl9pPr>
           </a:lstStyle>
           <a:p>
@@ -1278,8 +1278,8 @@
         </p:nvSpPr>
         <p:spPr>
           <a:xfrm>
-            <a:off x="6400627" y="1934175"/>
-            <a:ext cx="5569369" cy="806070"/>
+            <a:off x="10057783" y="2820420"/>
+            <a:ext cx="8751564" cy="1175414"/>
           </a:xfrm>
         </p:spPr>
         <p:txBody>
@@ -1287,39 +1287,39 @@
           <a:lstStyle>
             <a:lvl1pPr marL="0" indent="0">
               <a:buNone/>
-              <a:defRPr sz="1400" b="1"/>
+              <a:defRPr sz="2041" b="1"/>
             </a:lvl1pPr>
-            <a:lvl2pPr marL="266704" indent="0">
-              <a:buNone/>
-              <a:defRPr sz="1167" b="1"/>
+            <a:lvl2pPr marL="388908" indent="0">
+              <a:buNone/>
+              <a:defRPr sz="1702" b="1"/>
             </a:lvl2pPr>
-            <a:lvl3pPr marL="533407" indent="0">
-              <a:buNone/>
-              <a:defRPr sz="1050" b="1"/>
+            <a:lvl3pPr marL="777814" indent="0">
+              <a:buNone/>
+              <a:defRPr sz="1531" b="1"/>
             </a:lvl3pPr>
-            <a:lvl4pPr marL="800110" indent="0">
-              <a:buNone/>
-              <a:defRPr sz="933" b="1"/>
+            <a:lvl4pPr marL="1166720" indent="0">
+              <a:buNone/>
+              <a:defRPr sz="1361" b="1"/>
             </a:lvl4pPr>
-            <a:lvl5pPr marL="1066813" indent="0">
-              <a:buNone/>
-              <a:defRPr sz="933" b="1"/>
+            <a:lvl5pPr marL="1555627" indent="0">
+              <a:buNone/>
+              <a:defRPr sz="1361" b="1"/>
             </a:lvl5pPr>
-            <a:lvl6pPr marL="1333517" indent="0">
-              <a:buNone/>
-              <a:defRPr sz="933" b="1"/>
+            <a:lvl6pPr marL="1944534" indent="0">
+              <a:buNone/>
+              <a:defRPr sz="1361" b="1"/>
             </a:lvl6pPr>
-            <a:lvl7pPr marL="1600220" indent="0">
-              <a:buNone/>
-              <a:defRPr sz="933" b="1"/>
+            <a:lvl7pPr marL="2333441" indent="0">
+              <a:buNone/>
+              <a:defRPr sz="1361" b="1"/>
             </a:lvl7pPr>
-            <a:lvl8pPr marL="1866924" indent="0">
-              <a:buNone/>
-              <a:defRPr sz="933" b="1"/>
+            <a:lvl8pPr marL="2722349" indent="0">
+              <a:buNone/>
+              <a:defRPr sz="1361" b="1"/>
             </a:lvl8pPr>
-            <a:lvl9pPr marL="2133627" indent="0">
-              <a:buNone/>
-              <a:defRPr sz="933" b="1"/>
+            <a:lvl9pPr marL="3111255" indent="0">
+              <a:buNone/>
+              <a:defRPr sz="1361" b="1"/>
             </a:lvl9pPr>
           </a:lstStyle>
           <a:p>
@@ -1343,39 +1343,39 @@
         </p:nvSpPr>
         <p:spPr>
           <a:xfrm>
-            <a:off x="6400627" y="2740242"/>
-            <a:ext cx="5569369" cy="4978440"/>
+            <a:off x="10057783" y="3995830"/>
+            <a:ext cx="8751564" cy="7259577"/>
           </a:xfrm>
         </p:spPr>
         <p:txBody>
           <a:bodyPr/>
           <a:lstStyle>
             <a:lvl1pPr>
-              <a:defRPr sz="1400"/>
+              <a:defRPr sz="2041"/>
             </a:lvl1pPr>
             <a:lvl2pPr>
-              <a:defRPr sz="1167"/>
+              <a:defRPr sz="1702"/>
             </a:lvl2pPr>
             <a:lvl3pPr>
-              <a:defRPr sz="1050"/>
+              <a:defRPr sz="1531"/>
             </a:lvl3pPr>
             <a:lvl4pPr>
-              <a:defRPr sz="933"/>
+              <a:defRPr sz="1361"/>
             </a:lvl4pPr>
             <a:lvl5pPr>
-              <a:defRPr sz="933"/>
+              <a:defRPr sz="1361"/>
             </a:lvl5pPr>
             <a:lvl6pPr>
-              <a:defRPr sz="933"/>
+              <a:defRPr sz="1361"/>
             </a:lvl6pPr>
             <a:lvl7pPr>
-              <a:defRPr sz="933"/>
+              <a:defRPr sz="1361"/>
             </a:lvl7pPr>
             <a:lvl8pPr>
-              <a:defRPr sz="933"/>
+              <a:defRPr sz="1361"/>
             </a:lvl8pPr>
             <a:lvl9pPr>
-              <a:defRPr sz="933"/>
+              <a:defRPr sz="1361"/>
             </a:lvl9pPr>
           </a:lstStyle>
           <a:p>
@@ -1433,7 +1433,7 @@
           <a:p>
             <a:fld id="{E6744CE3-0875-4B69-89C0-6F72D8139561}" type="datetimeFigureOut">
               <a:rPr lang="en-GB" smtClean="0"/>
-              <a:t>06/02/2025</a:t>
+              <a:t>28/10/2025</a:t>
             </a:fld>
             <a:endParaRPr lang="en-GB"/>
           </a:p>
@@ -1551,7 +1551,7 @@
           <a:p>
             <a:fld id="{E6744CE3-0875-4B69-89C0-6F72D8139561}" type="datetimeFigureOut">
               <a:rPr lang="en-GB" smtClean="0"/>
-              <a:t>06/02/2025</a:t>
+              <a:t>28/10/2025</a:t>
             </a:fld>
             <a:endParaRPr lang="en-GB"/>
           </a:p>
@@ -1646,7 +1646,7 @@
           <a:p>
             <a:fld id="{E6744CE3-0875-4B69-89C0-6F72D8139561}" type="datetimeFigureOut">
               <a:rPr lang="en-GB" smtClean="0"/>
-              <a:t>06/02/2025</a:t>
+              <a:t>28/10/2025</a:t>
             </a:fld>
             <a:endParaRPr lang="en-GB"/>
           </a:p>
@@ -1741,8 +1741,8 @@
         </p:nvSpPr>
         <p:spPr>
           <a:xfrm>
-            <a:off x="630001" y="346034"/>
-            <a:ext cx="11339990" cy="1440127"/>
+            <a:off x="989968" y="504588"/>
+            <a:ext cx="17819371" cy="2099998"/>
           </a:xfrm>
           <a:prstGeom prst="rect">
             <a:avLst/>
@@ -1774,8 +1774,8 @@
         </p:nvSpPr>
         <p:spPr>
           <a:xfrm>
-            <a:off x="630001" y="2016180"/>
-            <a:ext cx="11339990" cy="5702504"/>
+            <a:off x="989968" y="2940000"/>
+            <a:ext cx="17819371" cy="8315409"/>
           </a:xfrm>
           <a:prstGeom prst="rect">
             <a:avLst/>
@@ -1836,8 +1836,8 @@
         </p:nvSpPr>
         <p:spPr>
           <a:xfrm>
-            <a:off x="630004" y="8008708"/>
-            <a:ext cx="2939997" cy="460041"/>
+            <a:off x="989973" y="11678324"/>
+            <a:ext cx="4619836" cy="670833"/>
           </a:xfrm>
           <a:prstGeom prst="rect">
             <a:avLst/>
@@ -1847,7 +1847,7 @@
           <a:bodyPr vert="horz" lIns="91440" tIns="45720" rIns="91440" bIns="45720" rtlCol="0" anchor="ctr"/>
           <a:lstStyle>
             <a:lvl1pPr algn="l">
-              <a:defRPr sz="700">
+              <a:defRPr sz="1021">
                 <a:solidFill>
                   <a:schemeClr val="tx1">
                     <a:tint val="75000"/>
@@ -1859,7 +1859,7 @@
           <a:p>
             <a:fld id="{E6744CE3-0875-4B69-89C0-6F72D8139561}" type="datetimeFigureOut">
               <a:rPr lang="en-GB" smtClean="0"/>
-              <a:t>06/02/2025</a:t>
+              <a:t>28/10/2025</a:t>
             </a:fld>
             <a:endParaRPr lang="en-GB"/>
           </a:p>
@@ -1877,8 +1877,8 @@
         </p:nvSpPr>
         <p:spPr>
           <a:xfrm>
-            <a:off x="4304999" y="8008708"/>
-            <a:ext cx="3989997" cy="460041"/>
+            <a:off x="6764766" y="11678324"/>
+            <a:ext cx="6269780" cy="670833"/>
           </a:xfrm>
           <a:prstGeom prst="rect">
             <a:avLst/>
@@ -1888,7 +1888,7 @@
           <a:bodyPr vert="horz" lIns="91440" tIns="45720" rIns="91440" bIns="45720" rtlCol="0" anchor="ctr"/>
           <a:lstStyle>
             <a:lvl1pPr algn="ctr">
-              <a:defRPr sz="700">
+              <a:defRPr sz="1021">
                 <a:solidFill>
                   <a:schemeClr val="tx1">
                     <a:tint val="75000"/>
@@ -1914,8 +1914,8 @@
         </p:nvSpPr>
         <p:spPr>
           <a:xfrm>
-            <a:off x="9029996" y="8008708"/>
-            <a:ext cx="2939997" cy="460041"/>
+            <a:off x="14189507" y="11678324"/>
+            <a:ext cx="4619836" cy="670833"/>
           </a:xfrm>
           <a:prstGeom prst="rect">
             <a:avLst/>
@@ -1925,7 +1925,7 @@
           <a:bodyPr vert="horz" lIns="91440" tIns="45720" rIns="91440" bIns="45720" rtlCol="0" anchor="ctr"/>
           <a:lstStyle>
             <a:lvl1pPr algn="r">
-              <a:defRPr sz="700">
+              <a:defRPr sz="1021">
                 <a:solidFill>
                   <a:schemeClr val="tx1">
                     <a:tint val="75000"/>
@@ -1962,12 +1962,12 @@
   </p:sldLayoutIdLst>
   <p:txStyles>
     <p:titleStyle>
-      <a:lvl1pPr algn="ctr" defTabSz="533407" rtl="0" eaLnBrk="1" latinLnBrk="0" hangingPunct="1">
+      <a:lvl1pPr algn="ctr" defTabSz="777814" rtl="0" eaLnBrk="1" latinLnBrk="0" hangingPunct="1">
         <a:spcBef>
           <a:spcPct val="0"/>
         </a:spcBef>
         <a:buNone/>
-        <a:defRPr sz="2567" kern="1200">
+        <a:defRPr sz="3743" kern="1200">
           <a:solidFill>
             <a:schemeClr val="tx1"/>
           </a:solidFill>
@@ -1978,13 +1978,13 @@
       </a:lvl1pPr>
     </p:titleStyle>
     <p:bodyStyle>
-      <a:lvl1pPr marL="200027" indent="-200027" algn="l" defTabSz="533407" rtl="0" eaLnBrk="1" latinLnBrk="0" hangingPunct="1">
+      <a:lvl1pPr marL="291679" indent="-291679" algn="l" defTabSz="777814" rtl="0" eaLnBrk="1" latinLnBrk="0" hangingPunct="1">
         <a:spcBef>
           <a:spcPct val="20000"/>
         </a:spcBef>
         <a:buFont typeface="Arial" panose="020B0604020202020204" pitchFamily="34" charset="0"/>
         <a:buChar char="•"/>
-        <a:defRPr sz="1867" kern="1200">
+        <a:defRPr sz="2722" kern="1200">
           <a:solidFill>
             <a:schemeClr val="tx1"/>
           </a:solidFill>
@@ -1993,13 +1993,13 @@
           <a:cs typeface="+mn-cs"/>
         </a:defRPr>
       </a:lvl1pPr>
-      <a:lvl2pPr marL="433393" indent="-166690" algn="l" defTabSz="533407" rtl="0" eaLnBrk="1" latinLnBrk="0" hangingPunct="1">
+      <a:lvl2pPr marL="631974" indent="-243067" algn="l" defTabSz="777814" rtl="0" eaLnBrk="1" latinLnBrk="0" hangingPunct="1">
         <a:spcBef>
           <a:spcPct val="20000"/>
         </a:spcBef>
         <a:buFont typeface="Arial" panose="020B0604020202020204" pitchFamily="34" charset="0"/>
         <a:buChar char="–"/>
-        <a:defRPr sz="1634" kern="1200">
+        <a:defRPr sz="2383" kern="1200">
           <a:solidFill>
             <a:schemeClr val="tx1"/>
           </a:solidFill>
@@ -2008,13 +2008,13 @@
           <a:cs typeface="+mn-cs"/>
         </a:defRPr>
       </a:lvl2pPr>
-      <a:lvl3pPr marL="666759" indent="-133352" algn="l" defTabSz="533407" rtl="0" eaLnBrk="1" latinLnBrk="0" hangingPunct="1">
+      <a:lvl3pPr marL="972268" indent="-194454" algn="l" defTabSz="777814" rtl="0" eaLnBrk="1" latinLnBrk="0" hangingPunct="1">
         <a:spcBef>
           <a:spcPct val="20000"/>
         </a:spcBef>
         <a:buFont typeface="Arial" panose="020B0604020202020204" pitchFamily="34" charset="0"/>
         <a:buChar char="•"/>
-        <a:defRPr sz="1400" kern="1200">
+        <a:defRPr sz="2041" kern="1200">
           <a:solidFill>
             <a:schemeClr val="tx1"/>
           </a:solidFill>
@@ -2023,13 +2023,13 @@
           <a:cs typeface="+mn-cs"/>
         </a:defRPr>
       </a:lvl3pPr>
-      <a:lvl4pPr marL="933461" indent="-133352" algn="l" defTabSz="533407" rtl="0" eaLnBrk="1" latinLnBrk="0" hangingPunct="1">
+      <a:lvl4pPr marL="1361173" indent="-194454" algn="l" defTabSz="777814" rtl="0" eaLnBrk="1" latinLnBrk="0" hangingPunct="1">
         <a:spcBef>
           <a:spcPct val="20000"/>
         </a:spcBef>
         <a:buFont typeface="Arial" panose="020B0604020202020204" pitchFamily="34" charset="0"/>
         <a:buChar char="–"/>
-        <a:defRPr sz="1167" kern="1200">
+        <a:defRPr sz="1702" kern="1200">
           <a:solidFill>
             <a:schemeClr val="tx1"/>
           </a:solidFill>
@@ -2038,13 +2038,13 @@
           <a:cs typeface="+mn-cs"/>
         </a:defRPr>
       </a:lvl4pPr>
-      <a:lvl5pPr marL="1200165" indent="-133352" algn="l" defTabSz="533407" rtl="0" eaLnBrk="1" latinLnBrk="0" hangingPunct="1">
+      <a:lvl5pPr marL="1750081" indent="-194454" algn="l" defTabSz="777814" rtl="0" eaLnBrk="1" latinLnBrk="0" hangingPunct="1">
         <a:spcBef>
           <a:spcPct val="20000"/>
         </a:spcBef>
         <a:buFont typeface="Arial" panose="020B0604020202020204" pitchFamily="34" charset="0"/>
         <a:buChar char="»"/>
-        <a:defRPr sz="1167" kern="1200">
+        <a:defRPr sz="1702" kern="1200">
           <a:solidFill>
             <a:schemeClr val="tx1"/>
           </a:solidFill>
@@ -2053,13 +2053,13 @@
           <a:cs typeface="+mn-cs"/>
         </a:defRPr>
       </a:lvl5pPr>
-      <a:lvl6pPr marL="1466868" indent="-133352" algn="l" defTabSz="533407" rtl="0" eaLnBrk="1" latinLnBrk="0" hangingPunct="1">
+      <a:lvl6pPr marL="2138987" indent="-194454" algn="l" defTabSz="777814" rtl="0" eaLnBrk="1" latinLnBrk="0" hangingPunct="1">
         <a:spcBef>
           <a:spcPct val="20000"/>
         </a:spcBef>
         <a:buFont typeface="Arial" panose="020B0604020202020204" pitchFamily="34" charset="0"/>
         <a:buChar char="•"/>
-        <a:defRPr sz="1167" kern="1200">
+        <a:defRPr sz="1702" kern="1200">
           <a:solidFill>
             <a:schemeClr val="tx1"/>
           </a:solidFill>
@@ -2068,13 +2068,13 @@
           <a:cs typeface="+mn-cs"/>
         </a:defRPr>
       </a:lvl6pPr>
-      <a:lvl7pPr marL="1733572" indent="-133352" algn="l" defTabSz="533407" rtl="0" eaLnBrk="1" latinLnBrk="0" hangingPunct="1">
+      <a:lvl7pPr marL="2527895" indent="-194454" algn="l" defTabSz="777814" rtl="0" eaLnBrk="1" latinLnBrk="0" hangingPunct="1">
         <a:spcBef>
           <a:spcPct val="20000"/>
         </a:spcBef>
         <a:buFont typeface="Arial" panose="020B0604020202020204" pitchFamily="34" charset="0"/>
         <a:buChar char="•"/>
-        <a:defRPr sz="1167" kern="1200">
+        <a:defRPr sz="1702" kern="1200">
           <a:solidFill>
             <a:schemeClr val="tx1"/>
           </a:solidFill>
@@ -2083,13 +2083,13 @@
           <a:cs typeface="+mn-cs"/>
         </a:defRPr>
       </a:lvl7pPr>
-      <a:lvl8pPr marL="2000275" indent="-133352" algn="l" defTabSz="533407" rtl="0" eaLnBrk="1" latinLnBrk="0" hangingPunct="1">
+      <a:lvl8pPr marL="2916801" indent="-194454" algn="l" defTabSz="777814" rtl="0" eaLnBrk="1" latinLnBrk="0" hangingPunct="1">
         <a:spcBef>
           <a:spcPct val="20000"/>
         </a:spcBef>
         <a:buFont typeface="Arial" panose="020B0604020202020204" pitchFamily="34" charset="0"/>
         <a:buChar char="•"/>
-        <a:defRPr sz="1167" kern="1200">
+        <a:defRPr sz="1702" kern="1200">
           <a:solidFill>
             <a:schemeClr val="tx1"/>
           </a:solidFill>
@@ -2098,13 +2098,13 @@
           <a:cs typeface="+mn-cs"/>
         </a:defRPr>
       </a:lvl8pPr>
-      <a:lvl9pPr marL="2266979" indent="-133352" algn="l" defTabSz="533407" rtl="0" eaLnBrk="1" latinLnBrk="0" hangingPunct="1">
+      <a:lvl9pPr marL="3305709" indent="-194454" algn="l" defTabSz="777814" rtl="0" eaLnBrk="1" latinLnBrk="0" hangingPunct="1">
         <a:spcBef>
           <a:spcPct val="20000"/>
         </a:spcBef>
         <a:buFont typeface="Arial" panose="020B0604020202020204" pitchFamily="34" charset="0"/>
         <a:buChar char="•"/>
-        <a:defRPr sz="1167" kern="1200">
+        <a:defRPr sz="1702" kern="1200">
           <a:solidFill>
             <a:schemeClr val="tx1"/>
           </a:solidFill>
@@ -2118,8 +2118,8 @@
       <a:defPPr>
         <a:defRPr lang="en-US"/>
       </a:defPPr>
-      <a:lvl1pPr marL="0" algn="l" defTabSz="533407" rtl="0" eaLnBrk="1" latinLnBrk="0" hangingPunct="1">
-        <a:defRPr sz="1050" kern="1200">
+      <a:lvl1pPr marL="0" algn="l" defTabSz="777814" rtl="0" eaLnBrk="1" latinLnBrk="0" hangingPunct="1">
+        <a:defRPr sz="1531" kern="1200">
           <a:solidFill>
             <a:schemeClr val="tx1"/>
           </a:solidFill>
@@ -2128,8 +2128,8 @@
           <a:cs typeface="+mn-cs"/>
         </a:defRPr>
       </a:lvl1pPr>
-      <a:lvl2pPr marL="266704" algn="l" defTabSz="533407" rtl="0" eaLnBrk="1" latinLnBrk="0" hangingPunct="1">
-        <a:defRPr sz="1050" kern="1200">
+      <a:lvl2pPr marL="388908" algn="l" defTabSz="777814" rtl="0" eaLnBrk="1" latinLnBrk="0" hangingPunct="1">
+        <a:defRPr sz="1531" kern="1200">
           <a:solidFill>
             <a:schemeClr val="tx1"/>
           </a:solidFill>
@@ -2138,8 +2138,8 @@
           <a:cs typeface="+mn-cs"/>
         </a:defRPr>
       </a:lvl2pPr>
-      <a:lvl3pPr marL="533407" algn="l" defTabSz="533407" rtl="0" eaLnBrk="1" latinLnBrk="0" hangingPunct="1">
-        <a:defRPr sz="1050" kern="1200">
+      <a:lvl3pPr marL="777814" algn="l" defTabSz="777814" rtl="0" eaLnBrk="1" latinLnBrk="0" hangingPunct="1">
+        <a:defRPr sz="1531" kern="1200">
           <a:solidFill>
             <a:schemeClr val="tx1"/>
           </a:solidFill>
@@ -2148,8 +2148,8 @@
           <a:cs typeface="+mn-cs"/>
         </a:defRPr>
       </a:lvl3pPr>
-      <a:lvl4pPr marL="800110" algn="l" defTabSz="533407" rtl="0" eaLnBrk="1" latinLnBrk="0" hangingPunct="1">
-        <a:defRPr sz="1050" kern="1200">
+      <a:lvl4pPr marL="1166720" algn="l" defTabSz="777814" rtl="0" eaLnBrk="1" latinLnBrk="0" hangingPunct="1">
+        <a:defRPr sz="1531" kern="1200">
           <a:solidFill>
             <a:schemeClr val="tx1"/>
           </a:solidFill>
@@ -2158,8 +2158,8 @@
           <a:cs typeface="+mn-cs"/>
         </a:defRPr>
       </a:lvl4pPr>
-      <a:lvl5pPr marL="1066813" algn="l" defTabSz="533407" rtl="0" eaLnBrk="1" latinLnBrk="0" hangingPunct="1">
-        <a:defRPr sz="1050" kern="1200">
+      <a:lvl5pPr marL="1555627" algn="l" defTabSz="777814" rtl="0" eaLnBrk="1" latinLnBrk="0" hangingPunct="1">
+        <a:defRPr sz="1531" kern="1200">
           <a:solidFill>
             <a:schemeClr val="tx1"/>
           </a:solidFill>
@@ -2168,8 +2168,8 @@
           <a:cs typeface="+mn-cs"/>
         </a:defRPr>
       </a:lvl5pPr>
-      <a:lvl6pPr marL="1333517" algn="l" defTabSz="533407" rtl="0" eaLnBrk="1" latinLnBrk="0" hangingPunct="1">
-        <a:defRPr sz="1050" kern="1200">
+      <a:lvl6pPr marL="1944534" algn="l" defTabSz="777814" rtl="0" eaLnBrk="1" latinLnBrk="0" hangingPunct="1">
+        <a:defRPr sz="1531" kern="1200">
           <a:solidFill>
             <a:schemeClr val="tx1"/>
           </a:solidFill>
@@ -2178,8 +2178,8 @@
           <a:cs typeface="+mn-cs"/>
         </a:defRPr>
       </a:lvl6pPr>
-      <a:lvl7pPr marL="1600220" algn="l" defTabSz="533407" rtl="0" eaLnBrk="1" latinLnBrk="0" hangingPunct="1">
-        <a:defRPr sz="1050" kern="1200">
+      <a:lvl7pPr marL="2333441" algn="l" defTabSz="777814" rtl="0" eaLnBrk="1" latinLnBrk="0" hangingPunct="1">
+        <a:defRPr sz="1531" kern="1200">
           <a:solidFill>
             <a:schemeClr val="tx1"/>
           </a:solidFill>
@@ -2188,8 +2188,8 @@
           <a:cs typeface="+mn-cs"/>
         </a:defRPr>
       </a:lvl7pPr>
-      <a:lvl8pPr marL="1866924" algn="l" defTabSz="533407" rtl="0" eaLnBrk="1" latinLnBrk="0" hangingPunct="1">
-        <a:defRPr sz="1050" kern="1200">
+      <a:lvl8pPr marL="2722349" algn="l" defTabSz="777814" rtl="0" eaLnBrk="1" latinLnBrk="0" hangingPunct="1">
+        <a:defRPr sz="1531" kern="1200">
           <a:solidFill>
             <a:schemeClr val="tx1"/>
           </a:solidFill>
@@ -2198,8 +2198,8 @@
           <a:cs typeface="+mn-cs"/>
         </a:defRPr>
       </a:lvl8pPr>
-      <a:lvl9pPr marL="2133627" algn="l" defTabSz="533407" rtl="0" eaLnBrk="1" latinLnBrk="0" hangingPunct="1">
-        <a:defRPr sz="1050" kern="1200">
+      <a:lvl9pPr marL="3111255" algn="l" defTabSz="777814" rtl="0" eaLnBrk="1" latinLnBrk="0" hangingPunct="1">
+        <a:defRPr sz="1531" kern="1200">
           <a:solidFill>
             <a:schemeClr val="tx1"/>
           </a:solidFill>
@@ -2258,8 +2258,8 @@
         </p:blipFill>
         <p:spPr>
           <a:xfrm>
-            <a:off x="7478126" y="977004"/>
-            <a:ext cx="4705594" cy="5880996"/>
+            <a:off x="11617606" y="1424671"/>
+            <a:ext cx="6861712" cy="8575687"/>
           </a:xfrm>
           <a:prstGeom prst="rect">
             <a:avLst/>
@@ -2280,8 +2280,8 @@
         </p:nvSpPr>
         <p:spPr>
           <a:xfrm>
-            <a:off x="10290470" y="683021"/>
-            <a:ext cx="1901530" cy="523220"/>
+            <a:off x="15718575" y="995984"/>
+            <a:ext cx="2772817" cy="720454"/>
           </a:xfrm>
           <a:prstGeom prst="rect">
             <a:avLst/>
@@ -2298,7 +2298,7 @@
           <a:p>
             <a:pPr algn="ctr"/>
             <a:r>
-              <a:rPr lang="fr-FR" sz="1400" b="1" dirty="0">
+              <a:rPr lang="fr-FR" sz="2041" b="1" dirty="0">
                 <a:latin typeface="Arial" panose="020B0604020202020204" pitchFamily="34" charset="0"/>
                 <a:cs typeface="Arial" panose="020B0604020202020204" pitchFamily="34" charset="0"/>
               </a:rPr>
@@ -2308,7 +2308,7 @@
           <a:p>
             <a:pPr algn="ctr"/>
             <a:r>
-              <a:rPr lang="fr-FR" sz="1400" b="1" i="1" dirty="0">
+              <a:rPr lang="fr-FR" sz="2041" b="1" i="1" dirty="0">
                 <a:latin typeface="Arial" panose="020B0604020202020204" pitchFamily="34" charset="0"/>
                 <a:cs typeface="Arial" panose="020B0604020202020204" pitchFamily="34" charset="0"/>
               </a:rPr>
@@ -2331,8 +2331,8 @@
         </p:nvSpPr>
         <p:spPr>
           <a:xfrm>
-            <a:off x="8000571" y="685477"/>
-            <a:ext cx="1963896" cy="523220"/>
+            <a:off x="12379437" y="999566"/>
+            <a:ext cx="2863759" cy="720454"/>
           </a:xfrm>
           <a:prstGeom prst="rect">
             <a:avLst/>
@@ -2349,7 +2349,7 @@
           <a:p>
             <a:pPr algn="ctr"/>
             <a:r>
-              <a:rPr lang="fr-FR" sz="1400" b="1" dirty="0">
+              <a:rPr lang="fr-FR" sz="2041" b="1" dirty="0">
                 <a:latin typeface="Arial" panose="020B0604020202020204" pitchFamily="34" charset="0"/>
                 <a:cs typeface="Arial" panose="020B0604020202020204" pitchFamily="34" charset="0"/>
               </a:rPr>
@@ -2359,7 +2359,7 @@
           <a:p>
             <a:pPr algn="ctr"/>
             <a:r>
-              <a:rPr lang="fr-FR" sz="1400" b="1" i="1" dirty="0">
+              <a:rPr lang="fr-FR" sz="2041" b="1" i="1" dirty="0">
                 <a:latin typeface="Arial" panose="020B0604020202020204" pitchFamily="34" charset="0"/>
                 <a:cs typeface="Arial" panose="020B0604020202020204" pitchFamily="34" charset="0"/>
               </a:rPr>
@@ -2382,8 +2382,8 @@
         </p:nvSpPr>
         <p:spPr>
           <a:xfrm>
-            <a:off x="294379" y="544173"/>
-            <a:ext cx="379332" cy="461665"/>
+            <a:off x="1142243" y="793515"/>
+            <a:ext cx="553143" cy="630942"/>
           </a:xfrm>
           <a:prstGeom prst="rect">
             <a:avLst/>
@@ -2400,7 +2400,7 @@
           <a:p>
             <a:pPr algn="ctr"/>
             <a:r>
-              <a:rPr lang="fr-FR" sz="2400" b="1" dirty="0">
+              <a:rPr lang="fr-FR" sz="3500" b="1" dirty="0">
                 <a:latin typeface="Arial" panose="020B0604020202020204" pitchFamily="34" charset="0"/>
                 <a:cs typeface="Arial" panose="020B0604020202020204" pitchFamily="34" charset="0"/>
               </a:rPr>
@@ -2423,8 +2423,8 @@
         </p:nvSpPr>
         <p:spPr>
           <a:xfrm>
-            <a:off x="2049889" y="1319000"/>
-            <a:ext cx="379332" cy="461665"/>
+            <a:off x="3702133" y="1923370"/>
+            <a:ext cx="553143" cy="630942"/>
           </a:xfrm>
           <a:prstGeom prst="rect">
             <a:avLst/>
@@ -2441,7 +2441,7 @@
           <a:p>
             <a:pPr algn="ctr"/>
             <a:r>
-              <a:rPr lang="fr-FR" sz="2400" b="1" dirty="0">
+              <a:rPr lang="fr-FR" sz="3500" b="1" dirty="0">
                 <a:latin typeface="Arial" panose="020B0604020202020204" pitchFamily="34" charset="0"/>
                 <a:cs typeface="Arial" panose="020B0604020202020204" pitchFamily="34" charset="0"/>
               </a:rPr>
@@ -2464,8 +2464,8 @@
         </p:nvSpPr>
         <p:spPr>
           <a:xfrm>
-            <a:off x="1" y="1998065"/>
-            <a:ext cx="1196458" cy="523220"/>
+            <a:off x="712980" y="2913586"/>
+            <a:ext cx="1744679" cy="720454"/>
           </a:xfrm>
           <a:prstGeom prst="rect">
             <a:avLst/>
@@ -2482,7 +2482,7 @@
           <a:p>
             <a:pPr algn="ctr"/>
             <a:r>
-              <a:rPr lang="fr-FR" sz="1400" b="1" dirty="0">
+              <a:rPr lang="fr-FR" sz="2041" b="1" dirty="0">
                 <a:latin typeface="Arial" panose="020B0604020202020204" pitchFamily="34" charset="0"/>
                 <a:cs typeface="Arial" panose="020B0604020202020204" pitchFamily="34" charset="0"/>
               </a:rPr>
@@ -2492,7 +2492,7 @@
           <a:p>
             <a:pPr algn="ctr"/>
             <a:r>
-              <a:rPr lang="fr-FR" sz="1400" b="1" i="1" dirty="0">
+              <a:rPr lang="fr-FR" sz="2041" b="1" i="1" dirty="0">
                 <a:latin typeface="Arial" panose="020B0604020202020204" pitchFamily="34" charset="0"/>
                 <a:cs typeface="Arial" panose="020B0604020202020204" pitchFamily="34" charset="0"/>
               </a:rPr>
@@ -2515,8 +2515,8 @@
         </p:nvSpPr>
         <p:spPr>
           <a:xfrm>
-            <a:off x="0" y="4795298"/>
-            <a:ext cx="1158463" cy="523220"/>
+            <a:off x="712980" y="6992519"/>
+            <a:ext cx="1689274" cy="720454"/>
           </a:xfrm>
           <a:prstGeom prst="rect">
             <a:avLst/>
@@ -2533,7 +2533,7 @@
           <a:p>
             <a:pPr algn="ctr"/>
             <a:r>
-              <a:rPr lang="fr-FR" sz="1400" b="1" dirty="0">
+              <a:rPr lang="fr-FR" sz="2041" b="1" dirty="0">
                 <a:latin typeface="Arial" panose="020B0604020202020204" pitchFamily="34" charset="0"/>
                 <a:cs typeface="Arial" panose="020B0604020202020204" pitchFamily="34" charset="0"/>
               </a:rPr>
@@ -2543,7 +2543,7 @@
           <a:p>
             <a:pPr algn="ctr"/>
             <a:r>
-              <a:rPr lang="fr-FR" sz="1400" b="1" i="1" dirty="0">
+              <a:rPr lang="fr-FR" sz="2041" b="1" i="1" dirty="0">
                 <a:latin typeface="Arial" panose="020B0604020202020204" pitchFamily="34" charset="0"/>
                 <a:cs typeface="Arial" panose="020B0604020202020204" pitchFamily="34" charset="0"/>
               </a:rPr>
@@ -2566,8 +2566,8 @@
         </p:nvSpPr>
         <p:spPr>
           <a:xfrm>
-            <a:off x="1611028" y="639310"/>
-            <a:ext cx="1901530" cy="307777"/>
+            <a:off x="3062185" y="932245"/>
+            <a:ext cx="2772817" cy="406393"/>
           </a:xfrm>
           <a:prstGeom prst="rect">
             <a:avLst/>
@@ -2584,13 +2584,13 @@
           <a:p>
             <a:pPr algn="ctr"/>
             <a:r>
-              <a:rPr lang="fr-FR" sz="1400" b="1" dirty="0" err="1">
+              <a:rPr lang="fr-FR" sz="2041" b="1" dirty="0" err="1">
                 <a:latin typeface="Arial" panose="020B0604020202020204" pitchFamily="34" charset="0"/>
                 <a:cs typeface="Arial" panose="020B0604020202020204" pitchFamily="34" charset="0"/>
               </a:rPr>
               <a:t>Women</a:t>
             </a:r>
-            <a:endParaRPr lang="fr-FR" sz="1400" b="1" i="1" dirty="0">
+            <a:endParaRPr lang="fr-FR" sz="2041" b="1" i="1" dirty="0">
               <a:latin typeface="Arial" panose="020B0604020202020204" pitchFamily="34" charset="0"/>
               <a:cs typeface="Arial" panose="020B0604020202020204" pitchFamily="34" charset="0"/>
             </a:endParaRPr>
@@ -2611,8 +2611,8 @@
         </p:nvSpPr>
         <p:spPr>
           <a:xfrm>
-            <a:off x="4514479" y="639310"/>
-            <a:ext cx="1901530" cy="307777"/>
+            <a:off x="7296006" y="932245"/>
+            <a:ext cx="2772817" cy="406393"/>
           </a:xfrm>
           <a:prstGeom prst="rect">
             <a:avLst/>
@@ -2629,13 +2629,13 @@
           <a:p>
             <a:pPr algn="ctr"/>
             <a:r>
-              <a:rPr lang="fr-FR" sz="1400" b="1" dirty="0">
+              <a:rPr lang="fr-FR" sz="2041" b="1" dirty="0">
                 <a:latin typeface="Arial" panose="020B0604020202020204" pitchFamily="34" charset="0"/>
                 <a:cs typeface="Arial" panose="020B0604020202020204" pitchFamily="34" charset="0"/>
               </a:rPr>
               <a:t>Men</a:t>
             </a:r>
-            <a:endParaRPr lang="fr-FR" sz="1400" b="1" i="1" dirty="0">
+            <a:endParaRPr lang="fr-FR" sz="2041" b="1" i="1" dirty="0">
               <a:latin typeface="Arial" panose="020B0604020202020204" pitchFamily="34" charset="0"/>
               <a:cs typeface="Arial" panose="020B0604020202020204" pitchFamily="34" charset="0"/>
             </a:endParaRPr>
@@ -2656,8 +2656,8 @@
         </p:nvSpPr>
         <p:spPr>
           <a:xfrm>
-            <a:off x="7206588" y="562365"/>
-            <a:ext cx="391773" cy="461665"/>
+            <a:off x="11221649" y="820043"/>
+            <a:ext cx="571285" cy="630942"/>
           </a:xfrm>
           <a:prstGeom prst="rect">
             <a:avLst/>
@@ -2674,7 +2674,7 @@
           <a:p>
             <a:pPr algn="ctr"/>
             <a:r>
-              <a:rPr lang="fr-FR" sz="2400" b="1" dirty="0">
+              <a:rPr lang="fr-FR" sz="3500" b="1" dirty="0">
                 <a:latin typeface="Arial" panose="020B0604020202020204" pitchFamily="34" charset="0"/>
                 <a:cs typeface="Arial" panose="020B0604020202020204" pitchFamily="34" charset="0"/>
               </a:rPr>
@@ -2710,8 +2710,8 @@
         </p:blipFill>
         <p:spPr>
           <a:xfrm>
-            <a:off x="1134524" y="3920875"/>
-            <a:ext cx="2777181" cy="2693217"/>
+            <a:off x="2367346" y="5717434"/>
+            <a:ext cx="4049694" cy="3927258"/>
           </a:xfrm>
           <a:prstGeom prst="rect">
             <a:avLst/>
@@ -2745,8 +2745,8 @@
         </p:blipFill>
         <p:spPr>
           <a:xfrm>
-            <a:off x="1158462" y="1081299"/>
-            <a:ext cx="2777181" cy="2693217"/>
+            <a:off x="2402252" y="1576755"/>
+            <a:ext cx="4049694" cy="3927258"/>
           </a:xfrm>
           <a:prstGeom prst="rect">
             <a:avLst/>
@@ -2780,8 +2780,8 @@
         </p:blipFill>
         <p:spPr>
           <a:xfrm>
-            <a:off x="4151883" y="1081299"/>
-            <a:ext cx="2778332" cy="2693217"/>
+            <a:off x="6767267" y="1576755"/>
+            <a:ext cx="4051373" cy="3927258"/>
           </a:xfrm>
           <a:prstGeom prst="rect">
             <a:avLst/>
@@ -2815,8 +2815,8 @@
         </p:blipFill>
         <p:spPr>
           <a:xfrm>
-            <a:off x="4170003" y="3920875"/>
-            <a:ext cx="2778332" cy="2693217"/>
+            <a:off x="6793690" y="5717434"/>
+            <a:ext cx="4051373" cy="3927258"/>
           </a:xfrm>
           <a:prstGeom prst="rect">
             <a:avLst/>
